--- a/statistics_13_misc.pptx
+++ b/statistics_13_misc.pptx
@@ -13273,7 +13273,7 @@
                   <a:srgbClr val="FF0000"/>
                 </a:solidFill>
               </a:rPr>
-              <a:t>Example – survivorship bias</a:t>
+              <a:t>Example - survivorship bias</a:t>
             </a:r>
             <a:r>
               <a:rPr lang="en-US" dirty="0"/>
@@ -13307,7 +13307,7 @@
             </a:pPr>
             <a:r>
               <a:rPr lang="en-US" dirty="0"/>
-              <a:t>Remove rows with missing data – and check how this will change the model. </a:t>
+              <a:t>Remove rows with missing data - and check how this will change the model. </a:t>
             </a:r>
           </a:p>
           <a:p>
@@ -13327,7 +13327,7 @@
             </a:pPr>
             <a:r>
               <a:rPr lang="en-US" dirty="0"/>
-              <a:t>Educated guess – infer the value</a:t>
+              <a:t>Educated guess - infer the value</a:t>
             </a:r>
           </a:p>
           <a:p>
@@ -13367,7 +13367,7 @@
             </a:pPr>
             <a:r>
               <a:rPr lang="en-US" dirty="0"/>
-              <a:t>Multiple Imputation – uses correlations, creates multiple simulated datasets (by adding random noise) – and then averages these datasets.</a:t>
+              <a:t>Multiple Imputation - uses correlations, creates multiple simulated datasets (by adding random noise) - and then averages these datasets.</a:t>
             </a:r>
           </a:p>
         </p:txBody>
@@ -13636,7 +13636,7 @@
             </a:r>
             <a:r>
               <a:rPr lang="en-US" sz="1200" dirty="0"/>
-              <a:t>  </a:t>
+              <a:t> </a:t>
             </a:r>
           </a:p>
           <a:p>
@@ -13676,7 +13676,7 @@
             </a:r>
             <a:r>
               <a:rPr lang="en-US" sz="1200" dirty="0"/>
-              <a:t>  </a:t>
+              <a:t> </a:t>
             </a:r>
           </a:p>
           <a:p>
@@ -13752,7 +13752,7 @@
             </a:pPr>
             <a:r>
               <a:rPr lang="en-US" sz="1200" dirty="0"/>
-              <a:t>Cauchy distribution – ratio of </a:t>
+              <a:t>Cauchy distribution - ratio of </a:t>
             </a:r>
             <a:r>
               <a:rPr lang="en-US" sz="1200" dirty="0" err="1"/>
@@ -13784,7 +13784,7 @@
             </a:r>
             <a:r>
               <a:rPr lang="en-US" sz="1200" dirty="0"/>
-              <a:t> – estimating uncertainty of your estimator when CLT doesn't apply</a:t>
+              <a:t> - estimating uncertainty of your estimator when CLT doesn't apply</a:t>
             </a:r>
           </a:p>
           <a:p>
@@ -13814,7 +13814,7 @@
             </a:pPr>
             <a:r>
               <a:rPr lang="en-US" sz="1200" dirty="0"/>
-              <a:t>Hyper geometric distribution use cases – without replacement in finite population</a:t>
+              <a:t>Hyper geometric distribution use cases - without replacement in finite population</a:t>
             </a:r>
           </a:p>
           <a:p>
@@ -13844,15 +13844,17 @@
             </a:pPr>
             <a:r>
               <a:rPr lang="en-US" sz="1200" dirty="0"/>
-              <a:t>Convolution - https://</a:t>
+              <a:t>Convolution - </a:t>
             </a:r>
             <a:r>
-              <a:rPr lang="en-US" sz="1200" dirty="0" err="1"/>
-              <a:t>en.wikipedia.org</a:t>
+              <a:rPr lang="en-US" sz="1200" dirty="0">
+                <a:hlinkClick r:id="rId7"/>
+              </a:rPr>
+              <a:t>https://en.wikipedia.org/wiki/Convolution</a:t>
             </a:r>
             <a:r>
               <a:rPr lang="en-US" sz="1200" dirty="0"/>
-              <a:t>/wiki/Convolution </a:t>
+              <a:t> </a:t>
             </a:r>
           </a:p>
           <a:p>
@@ -13862,19 +13864,13 @@
             </a:pPr>
             <a:r>
               <a:rPr lang="en-US" sz="1200" dirty="0"/>
-              <a:t>Functional Analysis - https://</a:t>
+              <a:t>Functional Analysis - </a:t>
             </a:r>
             <a:r>
-              <a:rPr lang="en-US" sz="1200" dirty="0" err="1"/>
-              <a:t>en.wikipedia.org</a:t>
-            </a:r>
-            <a:r>
-              <a:rPr lang="en-US" sz="1200" dirty="0"/>
-              <a:t>/wiki/</a:t>
-            </a:r>
-            <a:r>
-              <a:rPr lang="en-US" sz="1200" dirty="0" err="1"/>
-              <a:t>Functional_analysis</a:t>
+              <a:rPr lang="en-US" sz="1200" dirty="0">
+                <a:hlinkClick r:id="rId8"/>
+              </a:rPr>
+              <a:t>https://en.wikipedia.org/wiki/Functional_analysis</a:t>
             </a:r>
             <a:r>
               <a:rPr lang="en-US" sz="1200" dirty="0"/>
@@ -13898,23 +13894,17 @@
             </a:pPr>
             <a:r>
               <a:rPr lang="en-US" sz="1200" dirty="0"/>
-              <a:t> - https://</a:t>
+              <a:t> - </a:t>
             </a:r>
             <a:r>
-              <a:rPr lang="en-US" sz="1200" dirty="0" err="1"/>
-              <a:t>en.wikipedia.org</a:t>
+              <a:rPr lang="en-US" sz="1200" dirty="0">
+                <a:hlinkClick r:id="rId9"/>
+              </a:rPr>
+              <a:t>https://en.wikipedia.org/wiki/Signal-to-noise_ratio</a:t>
             </a:r>
             <a:r>
               <a:rPr lang="en-US" sz="1200" dirty="0"/>
-              <a:t>/wiki/Signal-to-</a:t>
-            </a:r>
-            <a:r>
-              <a:rPr lang="en-US" sz="1200" dirty="0" err="1"/>
-              <a:t>noise_ratio</a:t>
-            </a:r>
-            <a:r>
-              <a:rPr lang="en-US" sz="1200" dirty="0"/>
-              <a:t> –</a:t>
+              <a:t> -</a:t>
             </a:r>
           </a:p>
           <a:p>
@@ -13924,23 +13914,17 @@
             </a:pPr>
             <a:r>
               <a:rPr lang="en-US" sz="1200" dirty="0"/>
-              <a:t> - https://</a:t>
+              <a:t> - </a:t>
             </a:r>
             <a:r>
-              <a:rPr lang="en-US" sz="1200" dirty="0" err="1"/>
-              <a:t>en.wikipedia.org</a:t>
+              <a:rPr lang="en-US" sz="1200" dirty="0">
+                <a:hlinkClick r:id="rId10"/>
+              </a:rPr>
+              <a:t>https://en.wikipedia.org/wiki/Noise_reduction</a:t>
             </a:r>
             <a:r>
               <a:rPr lang="en-US" sz="1200" dirty="0"/>
-              <a:t>/wiki/</a:t>
-            </a:r>
-            <a:r>
-              <a:rPr lang="en-US" sz="1200" dirty="0" err="1"/>
-              <a:t>Noise_reduction</a:t>
-            </a:r>
-            <a:r>
-              <a:rPr lang="en-US" sz="1200" dirty="0"/>
-              <a:t> – (filtering, etc.). If we add N samples “s” of noisy data, then the signal will add proportionally to N, whereas noise will grow only as sqrt(N). So, if we add 100 samples, we will improve out Signal/Noise ratio ~10 times.</a:t>
+              <a:t> - (filtering, etc.). If we add N samples “s” of noisy data, then the signal will add proportionally to N, whereas noise will grow only as sqrt(N). So, if we add 100 samples, we will improve out Signal/Noise ratio ~10 times.</a:t>
             </a:r>
           </a:p>
           <a:p>
@@ -13957,19 +13941,13 @@
             </a:br>
             <a:r>
               <a:rPr lang="en-US" sz="1200" dirty="0"/>
-              <a:t> - https://</a:t>
+              <a:t> - </a:t>
             </a:r>
             <a:r>
-              <a:rPr lang="en-US" sz="1200" dirty="0" err="1"/>
-              <a:t>en.wikipedia.org</a:t>
-            </a:r>
-            <a:r>
-              <a:rPr lang="en-US" sz="1200" dirty="0"/>
-              <a:t>/wiki/</a:t>
-            </a:r>
-            <a:r>
-              <a:rPr lang="en-US" sz="1200" dirty="0" err="1"/>
-              <a:t>Monte_Carlo_method</a:t>
+              <a:rPr lang="en-US" sz="1200" dirty="0">
+                <a:hlinkClick r:id="rId11"/>
+              </a:rPr>
+              <a:t>https://en.wikipedia.org/wiki/Monte_Carlo_method</a:t>
             </a:r>
             <a:r>
               <a:rPr lang="en-US" sz="1200" dirty="0"/>
@@ -14023,169 +14001,129 @@
           <a:p>
             <a:r>
               <a:rPr lang="en-US" sz="1200" dirty="0"/>
-              <a:t>- https://</a:t>
+              <a:t>- </a:t>
             </a:r>
             <a:r>
-              <a:rPr lang="en-US" sz="1200" dirty="0" err="1"/>
-              <a:t>en.wikipedia.org</a:t>
+              <a:rPr lang="en-US" sz="1200" dirty="0">
+                <a:hlinkClick r:id="rId12"/>
+              </a:rPr>
+              <a:t>https://en.wikipedia.org/wiki/Stochastic_process</a:t>
             </a:r>
             <a:r>
               <a:rPr lang="en-US" sz="1200" dirty="0"/>
-              <a:t>/wiki/</a:t>
-            </a:r>
-            <a:r>
-              <a:rPr lang="en-US" sz="1200" dirty="0" err="1"/>
-              <a:t>Stochastic_process</a:t>
-            </a:r>
-            <a:r>
-              <a:rPr lang="en-US" sz="1200" dirty="0"/>
-              <a:t> –</a:t>
+              <a:t> -</a:t>
             </a:r>
           </a:p>
           <a:p>
             <a:r>
               <a:rPr lang="en-US" sz="1200" dirty="0"/>
-              <a:t>- https://</a:t>
+              <a:t>- </a:t>
             </a:r>
             <a:r>
-              <a:rPr lang="en-US" sz="1200" dirty="0" err="1"/>
-              <a:t>en.wikipedia.org</a:t>
+              <a:rPr lang="en-US" sz="1200" dirty="0">
+                <a:hlinkClick r:id="rId13"/>
+              </a:rPr>
+              <a:t>https://en.wikipedia.org/wiki/Time_series</a:t>
             </a:r>
             <a:r>
               <a:rPr lang="en-US" sz="1200" dirty="0"/>
-              <a:t>/wiki/</a:t>
-            </a:r>
-            <a:r>
-              <a:rPr lang="en-US" sz="1200" dirty="0" err="1"/>
-              <a:t>Time_series</a:t>
-            </a:r>
-            <a:r>
-              <a:rPr lang="en-US" sz="1200" dirty="0"/>
-              <a:t> –</a:t>
+              <a:t> -</a:t>
             </a:r>
           </a:p>
           <a:p>
             <a:r>
               <a:rPr lang="en-US" sz="1200" dirty="0"/>
-              <a:t>- https://</a:t>
+              <a:t>- </a:t>
             </a:r>
             <a:r>
-              <a:rPr lang="en-US" sz="1200" dirty="0" err="1"/>
-              <a:t>en.wikipedia.org</a:t>
+              <a:rPr lang="en-US" sz="1200" dirty="0">
+                <a:hlinkClick r:id="rId14"/>
+              </a:rPr>
+              <a:t>https://en.wikipedia.org/wiki/Random_walk</a:t>
             </a:r>
             <a:r>
               <a:rPr lang="en-US" sz="1200" dirty="0"/>
-              <a:t>/wiki/</a:t>
-            </a:r>
-            <a:r>
-              <a:rPr lang="en-US" sz="1200" dirty="0" err="1"/>
-              <a:t>Random_walk</a:t>
-            </a:r>
-            <a:r>
-              <a:rPr lang="en-US" sz="1200" dirty="0"/>
-              <a:t> –</a:t>
+              <a:t> -</a:t>
             </a:r>
           </a:p>
           <a:p>
             <a:r>
               <a:rPr lang="en-US" sz="1200" dirty="0"/>
-              <a:t>- https://</a:t>
+              <a:t>- </a:t>
             </a:r>
             <a:r>
-              <a:rPr lang="en-US" sz="1200" dirty="0" err="1"/>
-              <a:t>en.wikipedia.org</a:t>
+              <a:rPr lang="en-US" sz="1200" dirty="0">
+                <a:hlinkClick r:id="rId15"/>
+              </a:rPr>
+              <a:t>https://en.wikipedia.org/wiki/Brownian_motion</a:t>
             </a:r>
             <a:r>
               <a:rPr lang="en-US" sz="1200" dirty="0"/>
-              <a:t>/wiki/</a:t>
-            </a:r>
-            <a:r>
-              <a:rPr lang="en-US" sz="1200" dirty="0" err="1"/>
-              <a:t>Brownian_motion</a:t>
-            </a:r>
-            <a:r>
-              <a:rPr lang="en-US" sz="1200" dirty="0"/>
-              <a:t> –</a:t>
+              <a:t> -</a:t>
             </a:r>
           </a:p>
           <a:p>
             <a:r>
               <a:rPr lang="en-US" sz="1200" dirty="0"/>
-              <a:t>- https://</a:t>
+              <a:t>- </a:t>
             </a:r>
             <a:r>
-              <a:rPr lang="en-US" sz="1200" dirty="0" err="1"/>
-              <a:t>en.wikipedia.org</a:t>
+              <a:rPr lang="en-US" sz="1200" dirty="0">
+                <a:hlinkClick r:id="rId16"/>
+              </a:rPr>
+              <a:t>https://en.wikipedia.org/wiki/Diffusion</a:t>
             </a:r>
             <a:r>
               <a:rPr lang="en-US" sz="1200" dirty="0"/>
-              <a:t>/wiki/Diffusion , </a:t>
+              <a:t> - </a:t>
             </a:r>
           </a:p>
           <a:p>
             <a:r>
               <a:rPr lang="en-US" sz="1200" dirty="0"/>
-              <a:t>- https://</a:t>
+              <a:t>- </a:t>
             </a:r>
             <a:r>
-              <a:rPr lang="en-US" sz="1200" dirty="0" err="1"/>
-              <a:t>en.wikipedia.org</a:t>
+              <a:rPr lang="en-US" sz="1200" dirty="0">
+                <a:hlinkClick r:id="rId17"/>
+              </a:rPr>
+              <a:t>https://en.wikipedia.org/wiki/Diffusion_process</a:t>
             </a:r>
             <a:r>
               <a:rPr lang="en-US" sz="1200" dirty="0"/>
-              <a:t>/wiki/</a:t>
-            </a:r>
-            <a:r>
-              <a:rPr lang="en-US" sz="1200" dirty="0" err="1"/>
-              <a:t>Diffusion_process</a:t>
-            </a:r>
-            <a:r>
-              <a:rPr lang="en-US" sz="1200" dirty="0"/>
-              <a:t> –</a:t>
+              <a:t> -</a:t>
             </a:r>
           </a:p>
           <a:p>
             <a:r>
               <a:rPr lang="en-US" sz="1200" dirty="0"/>
-              <a:t>- https://</a:t>
+              <a:t>- </a:t>
             </a:r>
             <a:r>
-              <a:rPr lang="en-US" sz="1200" dirty="0" err="1"/>
-              <a:t>en.wikipedia.org</a:t>
+              <a:rPr lang="en-US" sz="1200" dirty="0">
+                <a:hlinkClick r:id="rId18"/>
+              </a:rPr>
+              <a:t>https://en.wikipedia.org/wiki/Stationary_process</a:t>
             </a:r>
             <a:r>
               <a:rPr lang="en-US" sz="1200" dirty="0"/>
-              <a:t>/wiki/</a:t>
-            </a:r>
-            <a:r>
-              <a:rPr lang="en-US" sz="1200" dirty="0" err="1"/>
-              <a:t>Stationary_process</a:t>
-            </a:r>
-            <a:r>
-              <a:rPr lang="en-US" sz="1200" dirty="0"/>
-              <a:t> –</a:t>
+              <a:t> -</a:t>
             </a:r>
           </a:p>
           <a:p>
             <a:r>
               <a:rPr lang="en-US" sz="1200" dirty="0"/>
-              <a:t>- https://</a:t>
+              <a:t>- </a:t>
             </a:r>
             <a:r>
-              <a:rPr lang="en-US" sz="1200" dirty="0" err="1"/>
-              <a:t>en.wikipedia.org</a:t>
+              <a:rPr lang="en-US" sz="1200" dirty="0">
+                <a:hlinkClick r:id="rId19"/>
+              </a:rPr>
+              <a:t>https://en.wikipedia.org/wiki/Stable_process</a:t>
             </a:r>
             <a:r>
               <a:rPr lang="en-US" sz="1200" dirty="0"/>
-              <a:t>/wiki/</a:t>
-            </a:r>
-            <a:r>
-              <a:rPr lang="en-US" sz="1200" dirty="0" err="1"/>
-              <a:t>Stable_process</a:t>
-            </a:r>
-            <a:r>
-              <a:rPr lang="en-US" sz="1200" dirty="0"/>
-              <a:t> –</a:t>
+              <a:t> -</a:t>
             </a:r>
           </a:p>
           <a:p>
@@ -14200,67 +14138,49 @@
           <a:p>
             <a:r>
               <a:rPr lang="en-US" sz="1200" dirty="0"/>
-              <a:t>– https://</a:t>
+              <a:t>- </a:t>
             </a:r>
             <a:r>
-              <a:rPr lang="en-US" sz="1200" dirty="0" err="1"/>
-              <a:t>en.wikipedia.org</a:t>
+              <a:rPr lang="en-US" sz="1200" dirty="0">
+                <a:hlinkClick r:id="rId20"/>
+              </a:rPr>
+              <a:t>https://en.wikipedia.org/wiki/Poisson_point_process</a:t>
             </a:r>
             <a:r>
               <a:rPr lang="en-US" sz="1200" dirty="0"/>
-              <a:t>/wiki/</a:t>
-            </a:r>
-            <a:r>
-              <a:rPr lang="en-US" sz="1200" dirty="0" err="1"/>
-              <a:t>Poisson_point_process</a:t>
-            </a:r>
-            <a:r>
-              <a:rPr lang="en-US" sz="1200" dirty="0"/>
-              <a:t> –</a:t>
+              <a:t> -</a:t>
             </a:r>
           </a:p>
           <a:p>
             <a:r>
               <a:rPr lang="en-US" sz="1200" dirty="0"/>
-              <a:t>– https://</a:t>
+              <a:t>- </a:t>
             </a:r>
             <a:r>
-              <a:rPr lang="en-US" sz="1200" dirty="0" err="1"/>
-              <a:t>en.wikipedia.org</a:t>
+              <a:rPr lang="en-US" sz="1200" dirty="0">
+                <a:hlinkClick r:id="rId21"/>
+              </a:rPr>
+              <a:t>https://en.wikipedia.org/wiki/Dirac_delta_function</a:t>
             </a:r>
             <a:r>
               <a:rPr lang="en-US" sz="1200" dirty="0"/>
-              <a:t>/wiki/</a:t>
-            </a:r>
-            <a:r>
-              <a:rPr lang="en-US" sz="1200" dirty="0" err="1"/>
-              <a:t>Dirac_delta_function</a:t>
-            </a:r>
-            <a:r>
-              <a:rPr lang="en-US" sz="1200" dirty="0"/>
-              <a:t> –</a:t>
+              <a:t> -</a:t>
             </a:r>
           </a:p>
           <a:p>
             <a:r>
               <a:rPr lang="en-US" sz="1200" dirty="0"/>
-              <a:t>– https://</a:t>
+              <a:t>- </a:t>
             </a:r>
             <a:r>
-              <a:rPr lang="en-US" sz="1200" dirty="0" err="1"/>
-              <a:t>en.wikipedia.org</a:t>
+              <a:rPr lang="en-US" sz="1200" dirty="0">
+                <a:hlinkClick r:id="rId22"/>
+              </a:rPr>
+              <a:t>https://en.wikipedia.org/wiki/Compound_Poisson_process</a:t>
             </a:r>
             <a:r>
               <a:rPr lang="en-US" sz="1200" dirty="0"/>
-              <a:t>/wiki/</a:t>
-            </a:r>
-            <a:r>
-              <a:rPr lang="en-US" sz="1200" dirty="0" err="1"/>
-              <a:t>Compound_Poisson_process</a:t>
-            </a:r>
-            <a:r>
-              <a:rPr lang="en-US" sz="1200" dirty="0"/>
-              <a:t> –</a:t>
+              <a:t> -</a:t>
             </a:r>
           </a:p>
           <a:p>
@@ -14275,67 +14195,49 @@
           <a:p>
             <a:r>
               <a:rPr lang="en-US" sz="1200" dirty="0"/>
-              <a:t>– https://</a:t>
+              <a:t>- </a:t>
             </a:r>
             <a:r>
-              <a:rPr lang="en-US" sz="1200" dirty="0" err="1"/>
-              <a:t>en.wikipedia.org</a:t>
+              <a:rPr lang="en-US" sz="1200" dirty="0">
+                <a:hlinkClick r:id="rId23"/>
+              </a:rPr>
+              <a:t>https://en.wikipedia.org/wiki/White_noise</a:t>
             </a:r>
             <a:r>
               <a:rPr lang="en-US" sz="1200" dirty="0"/>
-              <a:t>/wiki/</a:t>
-            </a:r>
-            <a:r>
-              <a:rPr lang="en-US" sz="1200" dirty="0" err="1"/>
-              <a:t>White_noise</a:t>
-            </a:r>
-            <a:r>
-              <a:rPr lang="en-US" sz="1200" dirty="0"/>
-              <a:t> –</a:t>
+              <a:t> -</a:t>
             </a:r>
           </a:p>
           <a:p>
             <a:r>
               <a:rPr lang="en-US" sz="1200" dirty="0"/>
-              <a:t>– https://</a:t>
+              <a:t>- </a:t>
             </a:r>
             <a:r>
-              <a:rPr lang="en-US" sz="1200" dirty="0" err="1"/>
-              <a:t>en.wikipedia.org</a:t>
+              <a:rPr lang="en-US" sz="1200" dirty="0">
+                <a:hlinkClick r:id="rId24"/>
+              </a:rPr>
+              <a:t>https://en.wikipedia.org/wiki/Gaussian_noise</a:t>
             </a:r>
             <a:r>
               <a:rPr lang="en-US" sz="1200" dirty="0"/>
-              <a:t>/wiki/</a:t>
-            </a:r>
-            <a:r>
-              <a:rPr lang="en-US" sz="1200" dirty="0" err="1"/>
-              <a:t>Gaussian_noise</a:t>
-            </a:r>
-            <a:r>
-              <a:rPr lang="en-US" sz="1200" dirty="0"/>
-              <a:t> –</a:t>
+              <a:t> -</a:t>
             </a:r>
           </a:p>
           <a:p>
             <a:r>
               <a:rPr lang="en-US" sz="1200" dirty="0"/>
-              <a:t>– https://</a:t>
+              <a:t>- </a:t>
             </a:r>
             <a:r>
-              <a:rPr lang="en-US" sz="1200" dirty="0" err="1"/>
-              <a:t>en.wikipedia.org</a:t>
+              <a:rPr lang="en-US" sz="1200" dirty="0">
+                <a:hlinkClick r:id="rId25"/>
+              </a:rPr>
+              <a:t>https://en.wikipedia.org/wiki/Brownian_noise</a:t>
             </a:r>
             <a:r>
               <a:rPr lang="en-US" sz="1200" dirty="0"/>
-              <a:t>/wiki/</a:t>
-            </a:r>
-            <a:r>
-              <a:rPr lang="en-US" sz="1200" dirty="0" err="1"/>
-              <a:t>Brownian_noise</a:t>
-            </a:r>
-            <a:r>
-              <a:rPr lang="en-US" sz="1200" dirty="0"/>
-              <a:t> –</a:t>
+              <a:t> -</a:t>
             </a:r>
           </a:p>
           <a:p>
@@ -14350,45 +14252,33 @@
           <a:p>
             <a:r>
               <a:rPr lang="en-US" sz="1200" dirty="0"/>
-              <a:t>– https://</a:t>
+              <a:t>- </a:t>
             </a:r>
             <a:r>
-              <a:rPr lang="en-US" sz="1200" dirty="0" err="1"/>
-              <a:t>en.wikipedia.org</a:t>
+              <a:rPr lang="en-US" sz="1200" dirty="0">
+                <a:hlinkClick r:id="rId26"/>
+              </a:rPr>
+              <a:t>https://en.wikipedia.org/wiki/Markov_chain</a:t>
             </a:r>
             <a:r>
               <a:rPr lang="en-US" sz="1200" dirty="0"/>
-              <a:t>/wiki/</a:t>
-            </a:r>
-            <a:r>
-              <a:rPr lang="en-US" sz="1200" dirty="0" err="1"/>
-              <a:t>Markov_chain</a:t>
-            </a:r>
-            <a:r>
-              <a:rPr lang="en-US" sz="1200" dirty="0"/>
-              <a:t> –</a:t>
+              <a:t> -</a:t>
             </a:r>
           </a:p>
           <a:p>
             <a:r>
               <a:rPr lang="en-US" sz="1200" dirty="0"/>
-              <a:t>– https://</a:t>
+              <a:t>- </a:t>
             </a:r>
             <a:r>
-              <a:rPr lang="en-US" sz="1200" dirty="0" err="1"/>
-              <a:t>en.wikipedia.org</a:t>
+              <a:rPr lang="en-US" sz="1200" dirty="0">
+                <a:hlinkClick r:id="rId27"/>
+              </a:rPr>
+              <a:t>https://en.wikipedia.org/wiki/Markov_process</a:t>
             </a:r>
             <a:r>
               <a:rPr lang="en-US" sz="1200" dirty="0"/>
-              <a:t>/wiki/</a:t>
-            </a:r>
-            <a:r>
-              <a:rPr lang="en-US" sz="1200" dirty="0" err="1"/>
-              <a:t>Markov_process</a:t>
-            </a:r>
-            <a:r>
-              <a:rPr lang="en-US" sz="1200" dirty="0"/>
-              <a:t> –</a:t>
+              <a:t> -</a:t>
             </a:r>
           </a:p>
           <a:p>
@@ -14403,37 +14293,33 @@
           <a:p>
             <a:r>
               <a:rPr lang="en-US" sz="1200" dirty="0"/>
-              <a:t>– https://</a:t>
+              <a:t>- </a:t>
             </a:r>
             <a:r>
-              <a:rPr lang="en-US" sz="1200" dirty="0" err="1"/>
-              <a:t>en.wikipedia.org</a:t>
+              <a:rPr lang="en-US" sz="1200" dirty="0">
+                <a:hlinkClick r:id="rId28"/>
+              </a:rPr>
+              <a:t>https://en.wikipedia.org/wiki/Correlation_function</a:t>
             </a:r>
             <a:r>
               <a:rPr lang="en-US" sz="1200" dirty="0"/>
-              <a:t>/wiki/</a:t>
-            </a:r>
-            <a:r>
-              <a:rPr lang="en-US" sz="1200" dirty="0" err="1"/>
-              <a:t>Correlation_function</a:t>
-            </a:r>
-            <a:r>
-              <a:rPr lang="en-US" sz="1200" dirty="0"/>
-              <a:t> –</a:t>
+              <a:t> -</a:t>
             </a:r>
           </a:p>
           <a:p>
             <a:r>
               <a:rPr lang="en-US" sz="1200" dirty="0"/>
-              <a:t>– https://</a:t>
+              <a:t>- </a:t>
             </a:r>
             <a:r>
-              <a:rPr lang="en-US" sz="1200" dirty="0" err="1"/>
-              <a:t>en.wikipedia.org</a:t>
+              <a:rPr lang="en-US" sz="1200" dirty="0">
+                <a:hlinkClick r:id="rId29"/>
+              </a:rPr>
+              <a:t>https://en.wikipedia.org/wiki/Autocorrelation</a:t>
             </a:r>
             <a:r>
               <a:rPr lang="en-US" sz="1200" dirty="0"/>
-              <a:t>/wiki/Autocorrelation –</a:t>
+              <a:t> -</a:t>
             </a:r>
           </a:p>
           <a:p>
@@ -14448,67 +14334,49 @@
           <a:p>
             <a:r>
               <a:rPr lang="en-US" sz="1200" dirty="0"/>
-              <a:t>– https://</a:t>
+              <a:t>- </a:t>
             </a:r>
             <a:r>
-              <a:rPr lang="en-US" sz="1200" dirty="0" err="1"/>
-              <a:t>en.wikipedia.org</a:t>
+              <a:rPr lang="en-US" sz="1200" dirty="0">
+                <a:hlinkClick r:id="rId30"/>
+              </a:rPr>
+              <a:t>https://en.wikipedia.org/wiki/Spectral_density</a:t>
             </a:r>
             <a:r>
               <a:rPr lang="en-US" sz="1200" dirty="0"/>
-              <a:t>/wiki/</a:t>
-            </a:r>
-            <a:r>
-              <a:rPr lang="en-US" sz="1200" dirty="0" err="1"/>
-              <a:t>Spectral_density</a:t>
-            </a:r>
-            <a:r>
-              <a:rPr lang="en-US" sz="1200" dirty="0"/>
-              <a:t> –</a:t>
+              <a:t> -</a:t>
             </a:r>
           </a:p>
           <a:p>
             <a:r>
               <a:rPr lang="en-US" sz="1200" dirty="0"/>
-              <a:t>– https://</a:t>
+              <a:t>- </a:t>
             </a:r>
             <a:r>
-              <a:rPr lang="en-US" sz="1200" dirty="0" err="1"/>
-              <a:t>en.wikipedia.org</a:t>
+              <a:rPr lang="en-US" sz="1200" dirty="0">
+                <a:hlinkClick r:id="rId31"/>
+              </a:rPr>
+              <a:t>https://en.wikipedia.org/wiki/Fourier_analysis</a:t>
             </a:r>
             <a:r>
               <a:rPr lang="en-US" sz="1200" dirty="0"/>
-              <a:t>/wiki/</a:t>
-            </a:r>
-            <a:r>
-              <a:rPr lang="en-US" sz="1200" dirty="0" err="1"/>
-              <a:t>Fourier_analysis</a:t>
-            </a:r>
-            <a:r>
-              <a:rPr lang="en-US" sz="1200" dirty="0"/>
-              <a:t> –</a:t>
+              <a:t> -</a:t>
             </a:r>
           </a:p>
           <a:p>
             <a:r>
               <a:rPr lang="en-US" sz="1200" dirty="0"/>
-              <a:t>– https://</a:t>
+              <a:t>- </a:t>
             </a:r>
             <a:r>
-              <a:rPr lang="en-US" sz="1200" dirty="0" err="1"/>
-              <a:t>en.wikipedia.org</a:t>
+              <a:rPr lang="en-US" sz="1200" dirty="0">
+                <a:hlinkClick r:id="rId32"/>
+              </a:rPr>
+              <a:t>https://en.wikipedia.org/wiki/Fast_Fourier_transform</a:t>
             </a:r>
             <a:r>
               <a:rPr lang="en-US" sz="1200" dirty="0"/>
-              <a:t>/wiki/</a:t>
-            </a:r>
-            <a:r>
-              <a:rPr lang="en-US" sz="1200" dirty="0" err="1"/>
-              <a:t>Fast_Fourier_transform</a:t>
-            </a:r>
-            <a:r>
-              <a:rPr lang="en-US" sz="1200" dirty="0"/>
-              <a:t> –</a:t>
+              <a:t> -</a:t>
             </a:r>
           </a:p>
         </p:txBody>

--- a/statistics_13_misc.pptx
+++ b/statistics_13_misc.pptx
@@ -13603,7 +13603,7 @@
         <p:spPr>
           <a:xfrm>
             <a:off x="0" y="565374"/>
-            <a:ext cx="6912864" cy="4893647"/>
+            <a:ext cx="6912864" cy="4524315"/>
           </a:xfrm>
           <a:prstGeom prst="rect">
             <a:avLst/>
@@ -13771,20 +13771,6 @@
             <a:r>
               <a:rPr lang="en-US" sz="1200" dirty="0"/>
               <a:t> </a:t>
-            </a:r>
-          </a:p>
-          <a:p>
-            <a:pPr marL="171450" indent="-171450">
-              <a:buFont typeface="Arial" panose="020B0604020202020204" pitchFamily="34" charset="0"/>
-              <a:buChar char="•"/>
-            </a:pPr>
-            <a:r>
-              <a:rPr lang="en-US" sz="1200" dirty="0" err="1"/>
-              <a:t>Bootstraping</a:t>
-            </a:r>
-            <a:r>
-              <a:rPr lang="en-US" sz="1200" dirty="0"/>
-              <a:t> - estimating uncertainty of your estimator when CLT doesn't apply</a:t>
             </a:r>
           </a:p>
           <a:p>
